--- a/figures/emitting_area_render.pptx
+++ b/figures/emitting_area_render.pptx
@@ -3185,7 +3185,7 @@
       </p:sp>
       <p:sp>
         <p:nvSpPr>
-          <p:cNvPr id="5" name="Conventional / Transparent electrode"/>
+          <p:cNvPr id="5" name="Conventional / Transparent conductive oxide (TCO)"/>
           <p:cNvSpPr txBox="1"/>
           <p:nvPr/>
         </p:nvSpPr>
@@ -3213,7 +3213,7 @@
                 </a:solidFill>
                 <a:latin typeface="Arial"/>
               </a:rPr>
-              <a:t>Transparent electrode</a:t>
+              <a:t>Transparent conductive oxide (TCO)</a:t>
             </a:r>
           </a:p>
         </p:txBody>
@@ -3332,7 +3332,7 @@
       </p:pic>
       <p:sp>
         <p:nvSpPr>
-          <p:cNvPr id="3" name="Design rule / Lossless metal electrode"/>
+          <p:cNvPr id="3" name="Design rule / Low loss metal electrode"/>
           <p:cNvSpPr txBox="1"/>
           <p:nvPr/>
         </p:nvSpPr>
@@ -3360,7 +3360,7 @@
                 </a:solidFill>
                 <a:latin typeface="Arial"/>
               </a:rPr>
-              <a:t>Lossless metal electrode</a:t>
+              <a:t>Low loss metal electrode</a:t>
             </a:r>
           </a:p>
         </p:txBody>
@@ -3402,7 +3402,7 @@
       </p:sp>
       <p:sp>
         <p:nvSpPr>
-          <p:cNvPr id="5" name="Design rule / Transparent electrode"/>
+          <p:cNvPr id="5" name="Design rule / Low loss TCO"/>
           <p:cNvSpPr txBox="1"/>
           <p:nvPr/>
         </p:nvSpPr>
@@ -3430,7 +3430,7 @@
                 </a:solidFill>
                 <a:latin typeface="Arial"/>
               </a:rPr>
-              <a:t>Transparent electrode</a:t>
+              <a:t>Low loss TCO</a:t>
             </a:r>
           </a:p>
         </p:txBody>
